--- a/UWIN_workshop_series/week1_github/github_presentation.pptx
+++ b/UWIN_workshop_series/week1_github/github_presentation.pptx
@@ -5,7 +5,7 @@
     <p:sldMasterId id="2147483660" r:id="rId1"/>
   </p:sldMasterIdLst>
   <p:notesMasterIdLst>
-    <p:notesMasterId r:id="rId45"/>
+    <p:notesMasterId r:id="rId46"/>
   </p:notesMasterIdLst>
   <p:sldIdLst>
     <p:sldId id="290" r:id="rId2"/>
@@ -51,6 +51,7 @@
     <p:sldId id="285" r:id="rId42"/>
     <p:sldId id="286" r:id="rId43"/>
     <p:sldId id="287" r:id="rId44"/>
+    <p:sldId id="317" r:id="rId45"/>
   </p:sldIdLst>
   <p:sldSz cx="9144000" cy="5143500" type="screen16x9"/>
   <p:notesSz cx="6858000" cy="9144000"/>
@@ -250,7 +251,7 @@
           <a:p>
             <a:fld id="{13B612FA-21AD-4EA5-BF54-3DAD016192F6}" type="datetimeFigureOut">
               <a:rPr lang="en-US" smtClean="0"/>
-              <a:t>2/17/2025</a:t>
+              <a:t>10/29/2026</a:t>
             </a:fld>
             <a:endParaRPr lang="en-US"/>
           </a:p>
@@ -13546,7 +13547,7 @@
           <a:p>
             <a:fld id="{241EB5C9-1307-BA42-ABA2-0BC069CD8E7F}" type="datetimeFigureOut">
               <a:rPr lang="en-US" smtClean="0"/>
-              <a:t>2/17/2025</a:t>
+              <a:t>10/29/2026</a:t>
             </a:fld>
             <a:endParaRPr lang="en-US"/>
           </a:p>
@@ -13791,7 +13792,7 @@
           <a:p>
             <a:fld id="{241EB5C9-1307-BA42-ABA2-0BC069CD8E7F}" type="datetimeFigureOut">
               <a:rPr lang="en-US" smtClean="0"/>
-              <a:t>2/17/2025</a:t>
+              <a:t>10/29/2026</a:t>
             </a:fld>
             <a:endParaRPr lang="en-US"/>
           </a:p>
@@ -31758,6 +31759,187 @@
 </p:sld>
 </file>
 
+<file path=ppt/slides/slide44.xml><?xml version="1.0" encoding="utf-8"?>
+<p:sld xmlns:a="http://schemas.openxmlformats.org/drawingml/2006/main" xmlns:r="http://schemas.openxmlformats.org/officeDocument/2006/relationships" xmlns:p="http://schemas.openxmlformats.org/presentationml/2006/main">
+  <p:cSld>
+    <p:spTree>
+      <p:nvGrpSpPr>
+        <p:cNvPr id="1" name=""/>
+        <p:cNvGrpSpPr/>
+        <p:nvPr/>
+      </p:nvGrpSpPr>
+      <p:grpSpPr>
+        <a:xfrm>
+          <a:off x="0" y="0"/>
+          <a:ext cx="0" cy="0"/>
+          <a:chOff x="0" y="0"/>
+          <a:chExt cx="0" cy="0"/>
+        </a:xfrm>
+      </p:grpSpPr>
+      <p:pic>
+        <p:nvPicPr>
+          <p:cNvPr id="5" name="Picture 4">
+            <a:extLst>
+              <a:ext uri="{FF2B5EF4-FFF2-40B4-BE49-F238E27FC236}">
+                <a16:creationId xmlns:a16="http://schemas.microsoft.com/office/drawing/2014/main" id="{51FFEDB0-58BC-4B5C-988D-2FA439CF512C}"/>
+              </a:ext>
+            </a:extLst>
+          </p:cNvPr>
+          <p:cNvPicPr>
+            <a:picLocks noChangeAspect="1"/>
+          </p:cNvPicPr>
+          <p:nvPr/>
+        </p:nvPicPr>
+        <p:blipFill>
+          <a:blip r:embed="rId2"/>
+          <a:stretch>
+            <a:fillRect/>
+          </a:stretch>
+        </p:blipFill>
+        <p:spPr>
+          <a:xfrm>
+            <a:off x="5358407" y="1107145"/>
+            <a:ext cx="2390305" cy="2607605"/>
+          </a:xfrm>
+          <a:prstGeom prst="rect">
+            <a:avLst/>
+          </a:prstGeom>
+        </p:spPr>
+      </p:pic>
+      <p:sp>
+        <p:nvSpPr>
+          <p:cNvPr id="6" name="TextBox 5">
+            <a:extLst>
+              <a:ext uri="{FF2B5EF4-FFF2-40B4-BE49-F238E27FC236}">
+                <a16:creationId xmlns:a16="http://schemas.microsoft.com/office/drawing/2014/main" id="{2C0F35E6-C1C4-4919-ABFA-CF11823C5049}"/>
+              </a:ext>
+            </a:extLst>
+          </p:cNvPr>
+          <p:cNvSpPr txBox="1"/>
+          <p:nvPr/>
+        </p:nvSpPr>
+        <p:spPr>
+          <a:xfrm>
+            <a:off x="4672013" y="3943350"/>
+            <a:ext cx="3750468" cy="646331"/>
+          </a:xfrm>
+          <a:prstGeom prst="rect">
+            <a:avLst/>
+          </a:prstGeom>
+          <a:noFill/>
+        </p:spPr>
+        <p:txBody>
+          <a:bodyPr wrap="square" rtlCol="0">
+            <a:spAutoFit/>
+          </a:bodyPr>
+          <a:lstStyle/>
+          <a:p>
+            <a:r>
+              <a:rPr lang="en-US" dirty="0"/>
+              <a:t>QR code to tutorial on how to link </a:t>
+            </a:r>
+            <a:r>
+              <a:rPr lang="en-US" dirty="0" err="1"/>
+              <a:t>zenodo</a:t>
+            </a:r>
+            <a:r>
+              <a:rPr lang="en-US" dirty="0"/>
+              <a:t> and GitHub</a:t>
+            </a:r>
+          </a:p>
+        </p:txBody>
+      </p:sp>
+      <p:sp>
+        <p:nvSpPr>
+          <p:cNvPr id="7" name="TextBox 6">
+            <a:extLst>
+              <a:ext uri="{FF2B5EF4-FFF2-40B4-BE49-F238E27FC236}">
+                <a16:creationId xmlns:a16="http://schemas.microsoft.com/office/drawing/2014/main" id="{FD4D9BBB-6223-4B5C-9853-4453E2E05766}"/>
+              </a:ext>
+            </a:extLst>
+          </p:cNvPr>
+          <p:cNvSpPr txBox="1"/>
+          <p:nvPr/>
+        </p:nvSpPr>
+        <p:spPr>
+          <a:xfrm>
+            <a:off x="592932" y="2387084"/>
+            <a:ext cx="4079081" cy="369332"/>
+          </a:xfrm>
+          <a:prstGeom prst="rect">
+            <a:avLst/>
+          </a:prstGeom>
+          <a:noFill/>
+        </p:spPr>
+        <p:txBody>
+          <a:bodyPr wrap="square" rtlCol="0">
+            <a:spAutoFit/>
+          </a:bodyPr>
+          <a:lstStyle/>
+          <a:p>
+            <a:r>
+              <a:rPr lang="en-US" dirty="0"/>
+              <a:t>https://zenodo.org/records/20428659</a:t>
+            </a:r>
+          </a:p>
+        </p:txBody>
+      </p:sp>
+      <p:sp>
+        <p:nvSpPr>
+          <p:cNvPr id="9" name="TextBox 8">
+            <a:extLst>
+              <a:ext uri="{FF2B5EF4-FFF2-40B4-BE49-F238E27FC236}">
+                <a16:creationId xmlns:a16="http://schemas.microsoft.com/office/drawing/2014/main" id="{84B5BC47-8FA0-4709-80DD-02ABB08AC145}"/>
+              </a:ext>
+            </a:extLst>
+          </p:cNvPr>
+          <p:cNvSpPr txBox="1"/>
+          <p:nvPr/>
+        </p:nvSpPr>
+        <p:spPr>
+          <a:xfrm>
+            <a:off x="1293019" y="414338"/>
+            <a:ext cx="5664994" cy="369332"/>
+          </a:xfrm>
+          <a:prstGeom prst="rect">
+            <a:avLst/>
+          </a:prstGeom>
+          <a:noFill/>
+        </p:spPr>
+        <p:txBody>
+          <a:bodyPr wrap="square" rtlCol="0">
+            <a:spAutoFit/>
+          </a:bodyPr>
+          <a:lstStyle/>
+          <a:p>
+            <a:r>
+              <a:rPr lang="en-US" dirty="0"/>
+              <a:t>Tutorial for linking </a:t>
+            </a:r>
+            <a:r>
+              <a:rPr lang="en-US" dirty="0" err="1"/>
+              <a:t>zenodo</a:t>
+            </a:r>
+            <a:r>
+              <a:rPr lang="en-US" dirty="0"/>
+              <a:t> to GitHub</a:t>
+            </a:r>
+          </a:p>
+        </p:txBody>
+      </p:sp>
+    </p:spTree>
+    <p:extLst>
+      <p:ext uri="{BB962C8B-B14F-4D97-AF65-F5344CB8AC3E}">
+        <p14:creationId xmlns:p14="http://schemas.microsoft.com/office/powerpoint/2010/main" val="3789218847"/>
+      </p:ext>
+    </p:extLst>
+  </p:cSld>
+  <p:clrMapOvr>
+    <a:masterClrMapping/>
+  </p:clrMapOvr>
+</p:sld>
+</file>
+
 <file path=ppt/slides/slide5.xml><?xml version="1.0" encoding="utf-8"?>
 <p:sld xmlns:a="http://schemas.openxmlformats.org/drawingml/2006/main" xmlns:r="http://schemas.openxmlformats.org/officeDocument/2006/relationships" xmlns:p="http://schemas.openxmlformats.org/presentationml/2006/main">
   <p:cSld>
